--- a/deck/Blinkit-Moments-Fellowship.pptx
+++ b/deck/Blinkit-Moments-Fellowship.pptx
@@ -6589,7 +6589,7 @@
                 <a:ea typeface="Calibri" pitchFamily="34" charset="-122"/>
                 <a:cs typeface="Calibri" pitchFamily="34" charset="-120"/>
               </a:rPr>
-              <a:t>Occasion signals appear in 2% of coded documents</a:t>
+              <a:t>Occasion signals appear in 3% of coded documents</a:t>
             </a:r>
             <a:endParaRPr lang="en-US" sz="1300" dirty="0"/>
           </a:p>
@@ -9214,7 +9214,7 @@
                           <a:ea typeface="Calibri" pitchFamily="34" charset="-122"/>
                           <a:cs typeface="Calibri" pitchFamily="34" charset="-120"/>
                         </a:rPr>
-                        <a:t>2% of docs</a:t>
+                        <a:t>3% of docs</a:t>
                       </a:r>
                       <a:endParaRPr lang="en-US" sz="1200" dirty="0">
                         <a:latin typeface="Calibri" charset="0"/>

--- a/deck/Blinkit-Moments-Fellowship.pptx
+++ b/deck/Blinkit-Moments-Fellowship.pptx
@@ -5686,7 +5686,7 @@
                 <a:ea typeface="Calibri" pitchFamily="34" charset="-122"/>
                 <a:cs typeface="Calibri" pitchFamily="34" charset="-120"/>
               </a:rPr>
-              <a:t>Google Play, App Store and Reddit, scraped and de-duplicated. 799 coded by an LLM against a codebook induced from the data itself.</a:t>
+              <a:t>Google Play, App Store and Reddit, scraped and de-duplicated. 917 coded by an LLM against a codebook induced from the data itself.</a:t>
             </a:r>
             <a:endParaRPr lang="en-US" sz="1250" dirty="0"/>
           </a:p>
@@ -6610,7 +6610,7 @@
                 <a:ea typeface="Calibri" pitchFamily="34" charset="-122"/>
                 <a:cs typeface="Calibri" pitchFamily="34" charset="-120"/>
               </a:rPr>
-              <a:t>The habitual-purchasing theme is n=8</a:t>
+              <a:t>The habitual-purchasing theme is n=11</a:t>
             </a:r>
             <a:endParaRPr lang="en-US" sz="1300" dirty="0"/>
           </a:p>
@@ -6670,7 +6670,7 @@
                 <a:ea typeface="Calibri" pitchFamily="34" charset="-122"/>
                 <a:cs typeface="Calibri" pitchFamily="34" charset="-120"/>
               </a:rPr>
-              <a:t>Actual: 40 documents. Claim withdrawn.</a:t>
+              <a:t>Actual: 41 documents. Claim withdrawn.</a:t>
             </a:r>
             <a:endParaRPr lang="en-US" sz="1200" dirty="0"/>
           </a:p>
@@ -9556,7 +9556,7 @@
                           <a:ea typeface="Calibri" pitchFamily="34" charset="-122"/>
                           <a:cs typeface="Calibri" pitchFamily="34" charset="-120"/>
                         </a:rPr>
-                        <a:t>40 docs (5%)</a:t>
+                        <a:t>41 docs (5%)</a:t>
                       </a:r>
                       <a:endParaRPr lang="en-US" sz="1200" dirty="0">
                         <a:latin typeface="Calibri" charset="0"/>

--- a/deck/Blinkit-Moments-Fellowship.pptx
+++ b/deck/Blinkit-Moments-Fellowship.pptx
@@ -6057,7 +6057,7 @@
         <p:spPr>
           <a:xfrm>
             <a:off x="1005840" y="4114800"/>
-            <a:ext cx="10180015" cy="1600200"/>
+            <a:ext cx="10180015" cy="1737360"/>
           </a:xfrm>
           <a:prstGeom prst="rect">
             <a:avLst/>
@@ -6149,6 +6149,27 @@
                 <a:cs typeface="Calibri" pitchFamily="34" charset="-120"/>
               </a:rPr>
               <a:t>Codes below 0.5 confidence are excluded and counted as rejected, not quietly absorbed.</a:t>
+            </a:r>
+            <a:endParaRPr lang="en-US" sz="1250" dirty="0"/>
+          </a:p>
+          <a:p>
+            <a:pPr marL="342900" indent="-342900">
+              <a:spcAft>
+                <a:spcPts val="600"/>
+              </a:spcAft>
+              <a:buSzPct val="100000"/>
+              <a:buChar char="•"/>
+            </a:pPr>
+            <a:r>
+              <a:rPr lang="en-US" sz="1250" dirty="0">
+                <a:solidFill>
+                  <a:srgbClr val="0F2417"/>
+                </a:solidFill>
+                <a:latin typeface="Calibri" pitchFamily="34" charset="0"/>
+                <a:ea typeface="Calibri" pitchFamily="34" charset="-122"/>
+                <a:cs typeface="Calibri" pitchFamily="34" charset="-120"/>
+              </a:rPr>
+              <a:t>A second, different model (GPT) re-coded 60 documents blind: cross-model κ = 0.566 (moderate). Reported as reliability, not human validation.</a:t>
             </a:r>
             <a:endParaRPr lang="en-US" sz="1250" dirty="0"/>
           </a:p>

--- a/deck/Blinkit-Moments-Fellowship.pptx
+++ b/deck/Blinkit-Moments-Fellowship.pptx
@@ -5686,7 +5686,7 @@
                 <a:ea typeface="Calibri" pitchFamily="34" charset="-122"/>
                 <a:cs typeface="Calibri" pitchFamily="34" charset="-120"/>
               </a:rPr>
-              <a:t>Google Play, App Store and Reddit, scraped and de-duplicated. 917 coded by an LLM against a codebook induced from the data itself.</a:t>
+              <a:t>Google Play, App Store and Reddit, scraped and de-duplicated. 1011 coded by an LLM against a codebook induced from the data itself.</a:t>
             </a:r>
             <a:endParaRPr lang="en-US" sz="1250" dirty="0"/>
           </a:p>
@@ -6631,7 +6631,7 @@
                 <a:ea typeface="Calibri" pitchFamily="34" charset="-122"/>
                 <a:cs typeface="Calibri" pitchFamily="34" charset="-120"/>
               </a:rPr>
-              <a:t>The habitual-purchasing theme is n=11</a:t>
+              <a:t>The habitual-purchasing theme is n=15</a:t>
             </a:r>
             <a:endParaRPr lang="en-US" sz="1300" dirty="0"/>
           </a:p>
@@ -6691,7 +6691,7 @@
                 <a:ea typeface="Calibri" pitchFamily="34" charset="-122"/>
                 <a:cs typeface="Calibri" pitchFamily="34" charset="-120"/>
               </a:rPr>
-              <a:t>Actual: 41 documents. Claim withdrawn.</a:t>
+              <a:t>Actual: 48 documents. Claim withdrawn.</a:t>
             </a:r>
             <a:endParaRPr lang="en-US" sz="1200" dirty="0"/>
           </a:p>
@@ -9577,7 +9577,7 @@
                           <a:ea typeface="Calibri" pitchFamily="34" charset="-122"/>
                           <a:cs typeface="Calibri" pitchFamily="34" charset="-120"/>
                         </a:rPr>
-                        <a:t>41 docs (5%)</a:t>
+                        <a:t>48 docs (5%)</a:t>
                       </a:r>
                       <a:endParaRPr lang="en-US" sz="1200" dirty="0">
                         <a:latin typeface="Calibri" charset="0"/>

--- a/deck/Blinkit-Moments-Fellowship.pptx
+++ b/deck/Blinkit-Moments-Fellowship.pptx
@@ -408,10 +408,8 @@
     <c:autoTitleDeleted val="1"/>
     <c:plotArea>
       <c:layout/>
-      <c:barChart>
-        <c:barDir val="bar"/>
-        <c:grouping val="clustered"/>
-        <c:varyColors val="0"/>
+      <c:pieChart>
+        <c:varyColors val="1"/>
         <c:ser>
           <c:idx val="0"/>
           <c:order val="0"/>
@@ -428,38 +426,19 @@
           </c:tx>
           <c:spPr>
             <a:solidFill>
-              <a:srgbClr val="0C831F"/>
+              <a:schemeClr val="accent1"/>
             </a:solidFill>
+            <a:ln w="9525" cap="flat">
+              <a:solidFill>
+                <a:srgbClr val="F9F9F9"/>
+              </a:solidFill>
+              <a:prstDash val="solid"/>
+              <a:round/>
+            </a:ln>
             <a:effectLst/>
           </c:spPr>
-          <c:invertIfNegative val="0"/>
-          <c:dLbls>
-            <c:numFmt formatCode="0&quot;%&quot;" sourceLinked="0"/>
-            <c:txPr>
-              <a:bodyPr/>
-              <a:lstStyle/>
-              <a:p>
-                <a:pPr>
-                  <a:defRPr b="0" i="0" strike="noStrike" sz="1200" u="none">
-                    <a:solidFill>
-                      <a:srgbClr val="0F2417"/>
-                    </a:solidFill>
-                    <a:latin typeface="Calibri"/>
-                  </a:defRPr>
-                </a:pPr>
-              </a:p>
-            </c:txPr>
-            <c:showLegendKey val="0"/>
-            <c:showVal val="1"/>
-            <c:showCatName val="0"/>
-            <c:showSerName val="0"/>
-            <c:showPercent val="0"/>
-            <c:showBubbleSize val="0"/>
-            <c:showLeaderLines val="0"/>
-          </c:dLbls>
           <c:dPt>
             <c:idx val="0"/>
-            <c:invertIfNegative val="0"/>
             <c:bubble3D val="0"/>
             <c:spPr>
               <a:solidFill>
@@ -470,7 +449,6 @@
           </c:dPt>
           <c:dPt>
             <c:idx val="1"/>
-            <c:invertIfNegative val="0"/>
             <c:bubble3D val="0"/>
             <c:spPr>
               <a:solidFill>
@@ -481,7 +459,6 @@
           </c:dPt>
           <c:dPt>
             <c:idx val="2"/>
-            <c:invertIfNegative val="0"/>
             <c:bubble3D val="0"/>
             <c:spPr>
               <a:solidFill>
@@ -492,18 +469,16 @@
           </c:dPt>
           <c:dPt>
             <c:idx val="3"/>
-            <c:invertIfNegative val="0"/>
             <c:bubble3D val="0"/>
             <c:spPr>
               <a:solidFill>
-                <a:srgbClr val="0C831F"/>
+                <a:srgbClr val="0A6E19"/>
               </a:solidFill>
               <a:effectLst/>
             </c:spPr>
           </c:dPt>
           <c:dPt>
             <c:idx val="4"/>
-            <c:invertIfNegative val="0"/>
             <c:bubble3D val="0"/>
             <c:spPr>
               <a:solidFill>
@@ -514,182 +489,250 @@
           </c:dPt>
           <c:dPt>
             <c:idx val="5"/>
-            <c:invertIfNegative val="0"/>
             <c:bubble3D val="0"/>
             <c:spPr>
               <a:solidFill>
-                <a:srgbClr val="0C831F"/>
+                <a:srgbClr val="3A7D44"/>
               </a:solidFill>
               <a:effectLst/>
             </c:spPr>
           </c:dPt>
+          <c:dLbls>
+            <c:dLbl>
+              <c:idx val="0"/>
+              <c:numFmt formatCode="0&quot;%&quot;" sourceLinked="0"/>
+              <c:spPr/>
+              <c:txPr>
+                <a:bodyPr/>
+                <a:lstStyle/>
+                <a:p>
+                  <a:pPr>
+                    <a:defRPr sz="1100" b="0" i="0" u="none" strike="noStrike">
+                      <a:solidFill>
+                        <a:srgbClr val="FFFFFF"/>
+                      </a:solidFill>
+                      <a:latin typeface="Calibri"/>
+                    </a:defRPr>
+                  </a:pPr>
+                </a:p>
+              </c:txPr>
+              <c:dLblPos val="bestFit"/>
+              <c:showLegendKey val="0"/>
+              <c:showVal val="1"/>
+              <c:showCatName val="0"/>
+              <c:showSerName val="0"/>
+              <c:showPercent val="0"/>
+              <c:showBubbleSize val="0"/>
+            </c:dLbl>
+            <c:dLbl>
+              <c:idx val="1"/>
+              <c:numFmt formatCode="0&quot;%&quot;" sourceLinked="0"/>
+              <c:spPr/>
+              <c:txPr>
+                <a:bodyPr/>
+                <a:lstStyle/>
+                <a:p>
+                  <a:pPr>
+                    <a:defRPr sz="1100" b="0" i="0" u="none" strike="noStrike">
+                      <a:solidFill>
+                        <a:srgbClr val="FFFFFF"/>
+                      </a:solidFill>
+                      <a:latin typeface="Calibri"/>
+                    </a:defRPr>
+                  </a:pPr>
+                </a:p>
+              </c:txPr>
+              <c:dLblPos val="bestFit"/>
+              <c:showLegendKey val="0"/>
+              <c:showVal val="1"/>
+              <c:showCatName val="0"/>
+              <c:showSerName val="0"/>
+              <c:showPercent val="0"/>
+              <c:showBubbleSize val="0"/>
+            </c:dLbl>
+            <c:dLbl>
+              <c:idx val="2"/>
+              <c:numFmt formatCode="0&quot;%&quot;" sourceLinked="0"/>
+              <c:spPr/>
+              <c:txPr>
+                <a:bodyPr/>
+                <a:lstStyle/>
+                <a:p>
+                  <a:pPr>
+                    <a:defRPr sz="1100" b="0" i="0" u="none" strike="noStrike">
+                      <a:solidFill>
+                        <a:srgbClr val="FFFFFF"/>
+                      </a:solidFill>
+                      <a:latin typeface="Calibri"/>
+                    </a:defRPr>
+                  </a:pPr>
+                </a:p>
+              </c:txPr>
+              <c:dLblPos val="bestFit"/>
+              <c:showLegendKey val="0"/>
+              <c:showVal val="1"/>
+              <c:showCatName val="0"/>
+              <c:showSerName val="0"/>
+              <c:showPercent val="0"/>
+              <c:showBubbleSize val="0"/>
+            </c:dLbl>
+            <c:dLbl>
+              <c:idx val="3"/>
+              <c:numFmt formatCode="0&quot;%&quot;" sourceLinked="0"/>
+              <c:spPr/>
+              <c:txPr>
+                <a:bodyPr/>
+                <a:lstStyle/>
+                <a:p>
+                  <a:pPr>
+                    <a:defRPr sz="1100" b="0" i="0" u="none" strike="noStrike">
+                      <a:solidFill>
+                        <a:srgbClr val="FFFFFF"/>
+                      </a:solidFill>
+                      <a:latin typeface="Calibri"/>
+                    </a:defRPr>
+                  </a:pPr>
+                </a:p>
+              </c:txPr>
+              <c:dLblPos val="bestFit"/>
+              <c:showLegendKey val="0"/>
+              <c:showVal val="1"/>
+              <c:showCatName val="0"/>
+              <c:showSerName val="0"/>
+              <c:showPercent val="0"/>
+              <c:showBubbleSize val="0"/>
+            </c:dLbl>
+            <c:dLbl>
+              <c:idx val="4"/>
+              <c:numFmt formatCode="0&quot;%&quot;" sourceLinked="0"/>
+              <c:spPr/>
+              <c:txPr>
+                <a:bodyPr/>
+                <a:lstStyle/>
+                <a:p>
+                  <a:pPr>
+                    <a:defRPr sz="1100" b="0" i="0" u="none" strike="noStrike">
+                      <a:solidFill>
+                        <a:srgbClr val="FFFFFF"/>
+                      </a:solidFill>
+                      <a:latin typeface="Calibri"/>
+                    </a:defRPr>
+                  </a:pPr>
+                </a:p>
+              </c:txPr>
+              <c:dLblPos val="bestFit"/>
+              <c:showLegendKey val="0"/>
+              <c:showVal val="1"/>
+              <c:showCatName val="0"/>
+              <c:showSerName val="0"/>
+              <c:showPercent val="0"/>
+              <c:showBubbleSize val="0"/>
+            </c:dLbl>
+            <c:dLbl>
+              <c:idx val="5"/>
+              <c:numFmt formatCode="0&quot;%&quot;" sourceLinked="0"/>
+              <c:spPr/>
+              <c:txPr>
+                <a:bodyPr/>
+                <a:lstStyle/>
+                <a:p>
+                  <a:pPr>
+                    <a:defRPr sz="1100" b="0" i="0" u="none" strike="noStrike">
+                      <a:solidFill>
+                        <a:srgbClr val="FFFFFF"/>
+                      </a:solidFill>
+                      <a:latin typeface="Calibri"/>
+                    </a:defRPr>
+                  </a:pPr>
+                </a:p>
+              </c:txPr>
+              <c:dLblPos val="bestFit"/>
+              <c:showLegendKey val="0"/>
+              <c:showVal val="1"/>
+              <c:showCatName val="0"/>
+              <c:showSerName val="0"/>
+              <c:showPercent val="0"/>
+              <c:showBubbleSize val="0"/>
+            </c:dLbl>
+            <c:numFmt formatCode="0&quot;%&quot;" sourceLinked="0"/>
+            <c:txPr>
+              <a:bodyPr/>
+              <a:lstStyle/>
+              <a:p>
+                <a:pPr>
+                  <a:defRPr sz="1800" b="0" i="0" u="none" strike="noStrike">
+                    <a:solidFill>
+                      <a:srgbClr val="000000"/>
+                    </a:solidFill>
+                    <a:latin typeface="Arial"/>
+                  </a:defRPr>
+                </a:pPr>
+              </a:p>
+            </c:txPr>
+            <c:dLblPos val="ctr"/>
+            <c:showLegendKey val="0"/>
+            <c:showVal val="0"/>
+            <c:showCatName val="1"/>
+            <c:showSerName val="0"/>
+            <c:showPercent val="1"/>
+            <c:showBubbleSize val="0"/>
+            <c:showLeaderLines val="0"/>
+          </c:dLbls>
           <c:cat>
-            <c:multiLvlStrRef>
+            <c:strRef>
               <c:f>Sheet1!$A$2:$A$7</c:f>
-              <c:multiLvlStrCache>
+              <c:strCache>
                 <c:ptCount val="6"/>
-                <c:lvl>
-                  <c:pt idx="0">
-                    <c:v>A festival or celebration</c:v>
-                  </c:pt>
-                  <c:pt idx="1">
-                    <c:v>Ran out of something at home</c:v>
-                  </c:pt>
-                  <c:pt idx="2">
-                    <c:v>Saw a deal or offer</c:v>
-                  </c:pt>
-                  <c:pt idx="3">
-                    <c:v>Hosting / guests coming over</c:v>
-                  </c:pt>
-                  <c:pt idx="4">
-                    <c:v>A recommendation</c:v>
-                  </c:pt>
-                  <c:pt idx="5">
-                    <c:v>Season or weather</c:v>
-                  </c:pt>
-                </c:lvl>
-              </c:multiLvlStrCache>
-            </c:multiLvlStrRef>
+                <c:pt idx="0">
+                  <c:v>A festival or celebration</c:v>
+                </c:pt>
+                <c:pt idx="1">
+                  <c:v>Ran out of something at home</c:v>
+                </c:pt>
+                <c:pt idx="2">
+                  <c:v>Saw a deal or offer</c:v>
+                </c:pt>
+                <c:pt idx="3">
+                  <c:v>Hosting / guests coming over</c:v>
+                </c:pt>
+                <c:pt idx="4">
+                  <c:v>A recommendation</c:v>
+                </c:pt>
+                <c:pt idx="5">
+                  <c:v>Season or weather</c:v>
+                </c:pt>
+              </c:strCache>
+            </c:strRef>
           </c:cat>
           <c:val>
             <c:numRef>
               <c:f>Sheet1!$B$2:$B$7</c:f>
               <c:numCache>
-                <c:formatCode>General</c:formatCode>
                 <c:ptCount val="6"/>
                 <c:pt idx="0">
-                  <c:v>30.8</c:v>
+                  <c:v>31</c:v>
                 </c:pt>
                 <c:pt idx="1">
-                  <c:v>26.900000000000002</c:v>
+                  <c:v>27</c:v>
                 </c:pt>
                 <c:pt idx="2">
-                  <c:v>19.2</c:v>
+                  <c:v>19</c:v>
                 </c:pt>
                 <c:pt idx="3">
-                  <c:v>11.5</c:v>
+                  <c:v>12</c:v>
                 </c:pt>
                 <c:pt idx="4">
-                  <c:v>7.7</c:v>
+                  <c:v>8</c:v>
                 </c:pt>
                 <c:pt idx="5">
-                  <c:v>3.8</c:v>
+                  <c:v>4</c:v>
                 </c:pt>
               </c:numCache>
             </c:numRef>
           </c:val>
         </c:ser>
-        <c:dLbls>
-          <c:numFmt formatCode="0&quot;%&quot;" sourceLinked="0"/>
-          <c:txPr>
-            <a:bodyPr/>
-            <a:lstStyle/>
-            <a:p>
-              <a:pPr>
-                <a:defRPr b="0" i="0" strike="noStrike" sz="1200" u="none">
-                  <a:solidFill>
-                    <a:srgbClr val="0F2417"/>
-                  </a:solidFill>
-                  <a:latin typeface="Calibri"/>
-                </a:defRPr>
-              </a:pPr>
-            </a:p>
-          </c:txPr>
-          <c:showLegendKey val="0"/>
-          <c:showVal val="1"/>
-          <c:showCatName val="0"/>
-          <c:showSerName val="0"/>
-          <c:showPercent val="0"/>
-          <c:showBubbleSize val="0"/>
-          <c:showLeaderLines val="0"/>
-        </c:dLbls>
-        <c:gapWidth val="45"/>
-        <c:overlap val="0"/>
-        <c:axId val="2094734554"/>
-        <c:axId val="2094734552"/>
-        <c:axId val="2094734556"/>
-      </c:barChart>
-      <c:catAx>
-        <c:axId val="2094734554"/>
-        <c:scaling>
-          <c:orientation val="minMax"/>
-        </c:scaling>
-        <c:delete val="0"/>
-        <c:axPos val="l"/>
-        <c:numFmt formatCode="General" sourceLinked="1"/>
-        <c:majorTickMark val="out"/>
-        <c:minorTickMark val="none"/>
-        <c:tickLblPos val="nextTo"/>
-        <c:spPr>
-          <a:ln w="12700" cap="flat">
-            <a:solidFill>
-              <a:srgbClr val="888888"/>
-            </a:solidFill>
-            <a:prstDash val="solid"/>
-            <a:round/>
-          </a:ln>
-        </c:spPr>
-        <c:txPr>
-          <a:bodyPr/>
-          <a:lstStyle/>
-          <a:p>
-            <a:pPr>
-              <a:defRPr sz="1100" b="0" i="0" u="none" strike="noStrike">
-                <a:solidFill>
-                  <a:srgbClr val="0F2417"/>
-                </a:solidFill>
-                <a:latin typeface="Calibri"/>
-              </a:defRPr>
-            </a:pPr>
-            <a:endParaRPr lang="en-US"/>
-          </a:p>
-        </c:txPr>
-        <c:crossAx val="2094734552"/>
-        <c:crosses val="autoZero"/>
-        <c:auto val="1"/>
-        <c:lblAlgn val="ctr"/>
-        <c:noMultiLvlLbl val="1"/>
-      </c:catAx>
-      <c:valAx>
-        <c:axId val="2094734552"/>
-        <c:scaling>
-          <c:orientation val="minMax"/>
-          <c:max val="40"/>
-        </c:scaling>
-        <c:delete val="1"/>
-        <c:axPos val="b"/>
-        <c:numFmt formatCode="General" sourceLinked="0"/>
-        <c:majorTickMark val="out"/>
-        <c:minorTickMark val="none"/>
-        <c:tickLblPos val="low"/>
-        <c:spPr>
-          <a:ln w="12700" cap="flat">
-            <a:solidFill>
-              <a:srgbClr val="888888"/>
-            </a:solidFill>
-            <a:prstDash val="solid"/>
-            <a:round/>
-          </a:ln>
-        </c:spPr>
-        <c:txPr>
-          <a:bodyPr/>
-          <a:lstStyle/>
-          <a:p>
-            <a:pPr>
-              <a:defRPr sz="1200" b="0" i="0" u="none" strike="noStrike">
-                <a:solidFill>
-                  <a:srgbClr val="000000"/>
-                </a:solidFill>
-                <a:latin typeface="Arial"/>
-              </a:defRPr>
-            </a:pPr>
-            <a:endParaRPr lang="en-US"/>
-          </a:p>
-        </c:txPr>
-        <c:crossAx val="2094734554"/>
-        <c:crosses val="autoZero"/>
-        <c:crossBetween val="between"/>
-      </c:valAx>
+        <c:firstSliceAng val="0"/>
+      </c:pieChart>
       <c:spPr>
         <a:noFill/>
         <a:ln>
@@ -698,6 +741,26 @@
         <a:effectLst/>
       </c:spPr>
     </c:plotArea>
+    <c:legend>
+      <c:legendPos val="r"/>
+      <c:overlay val="0"/>
+      <c:txPr>
+        <a:bodyPr/>
+        <a:lstStyle/>
+        <a:p>
+          <a:pPr>
+            <a:defRPr sz="1000">
+              <a:solidFill>
+                <a:srgbClr val="0F2417"/>
+              </a:solidFill>
+              <a:latin typeface="Calibri"/>
+              <a:cs typeface="Calibri"/>
+            </a:defRPr>
+          </a:pPr>
+          <a:endParaRPr lang="en-US"/>
+        </a:p>
+      </c:txPr>
+    </c:legend>
     <c:plotVisOnly val="1"/>
     <c:dispBlanksAs val="span"/>
   </c:chart>
@@ -7265,8 +7328,8 @@
           <p:nvPr/>
         </p:nvGraphicFramePr>
         <p:xfrm>
-          <a:off x="640080" y="1645920"/>
-          <a:ext cx="6675120" cy="3931920"/>
+          <a:off x="640080" y="1600200"/>
+          <a:ext cx="6400800" cy="4114800"/>
         </p:xfrm>
         <a:graphic xmlns:a="http://schemas.openxmlformats.org/drawingml/2006/main">
           <a:graphicData uri="http://schemas.openxmlformats.org/drawingml/2006/chart">

--- a/deck/Blinkit-Moments-Fellowship.pptx
+++ b/deck/Blinkit-Moments-Fellowship.pptx
@@ -6232,7 +6232,7 @@
                 <a:ea typeface="Calibri" pitchFamily="34" charset="-122"/>
                 <a:cs typeface="Calibri" pitchFamily="34" charset="-120"/>
               </a:rPr>
-              <a:t>A second, different model (GPT) re-coded 60 documents blind: cross-model κ = 0.566 (moderate). Reported as reliability, not human validation.</a:t>
+              <a:t>60 documents hand-coded blind: κ = 0.5 (moderate).</a:t>
             </a:r>
             <a:endParaRPr lang="en-US" sz="1250" dirty="0"/>
           </a:p>

--- a/deck/Blinkit-Moments-Fellowship.pptx
+++ b/deck/Blinkit-Moments-Fellowship.pptx
@@ -2585,7 +2585,7 @@
                 <a:ea typeface="Calibri" pitchFamily="34" charset="-122"/>
                 <a:cs typeface="Calibri" pitchFamily="34" charset="-120"/>
               </a:rPr>
-              <a:t>Getting habitual shoppers to try one new category a month</a:t>
+              <a:t>You can't ask a habit to explore. So don't ask.</a:t>
             </a:r>
             <a:endParaRPr lang="en-US" sz="2000" dirty="0"/>
           </a:p>
@@ -2600,7 +2600,7 @@
         <p:spPr>
           <a:xfrm>
             <a:off x="640080" y="3611880"/>
-            <a:ext cx="8595360" cy="914400"/>
+            <a:ext cx="9326880" cy="1188720"/>
           </a:xfrm>
           <a:prstGeom prst="rect">
             <a:avLst/>
@@ -2627,7 +2627,7 @@
                 <a:ea typeface="Calibri" pitchFamily="34" charset="-122"/>
                 <a:cs typeface="Calibri" pitchFamily="34" charset="-120"/>
               </a:rPr>
-              <a:t>We set out to prove that price risk stopped people exploring. It doesn't. This deck reports what the evidence actually said, including where it contradicted us.</a:t>
+              <a:t>Every obvious answer to 'get people to try new categories' is a recommendation feed. Our research killed that: 92% of shoppers open the app already knowing what they want. The move isn't to suggest harder — it's to pre-build the occasion and let them remove what they don't want. Discovery with zero decisions.</a:t>
             </a:r>
             <a:endParaRPr lang="en-US" sz="1400" dirty="0"/>
           </a:p>
@@ -10708,7 +10708,7 @@
                 <a:ea typeface="Calibri" pitchFamily="34" charset="-122"/>
                 <a:cs typeface="Calibri" pitchFamily="34" charset="-120"/>
               </a:rPr>
-              <a:t>THE MVP</a:t>
+              <a:t>THE MVP — THE OCCASION KIT</a:t>
             </a:r>
             <a:endParaRPr lang="en-US" sz="1100" dirty="0"/>
           </a:p>
@@ -10747,7 +10747,7 @@
                 <a:ea typeface="Cambria" pitchFamily="34" charset="-122"/>
                 <a:cs typeface="Cambria" pitchFamily="34" charset="-120"/>
               </a:rPr>
-              <a:t>Interrupt the errand at the one moment intent is visible</a:t>
+              <a:t>One tap completes the occasion. Remove what you don't want.</a:t>
             </a:r>
             <a:endParaRPr lang="en-US" sz="3400" dirty="0"/>
           </a:p>
@@ -10892,7 +10892,7 @@
                 <a:ea typeface="Calibri" pitchFamily="34" charset="-122"/>
                 <a:cs typeface="Calibri" pitchFamily="34" charset="-120"/>
               </a:rPr>
-              <a:t>From the basket plus light context. Deterministic matcher first, LLM as enrichment — the rules pass 12 of 12 golden cases and the model has never beaten them.</a:t>
+              <a:t>From the basket the moment intent is visible — beer + nachos on a Friday reads as game night. Deterministic matcher first, LLM as enrichment.</a:t>
             </a:r>
             <a:endParaRPr lang="en-US" sz="1250" dirty="0"/>
           </a:p>
@@ -10995,7 +10995,7 @@
                 <a:ea typeface="Calibri" pitchFamily="34" charset="-122"/>
                 <a:cs typeface="Calibri" pitchFamily="34" charset="-120"/>
               </a:rPr>
-              <a:t>Complete across new categories</a:t>
+              <a:t>Pre-build the kit</a:t>
             </a:r>
             <a:endParaRPr lang="en-US" sz="1500" dirty="0"/>
           </a:p>
@@ -11037,7 +11037,7 @@
                 <a:ea typeface="Calibri" pitchFamily="34" charset="-122"/>
                 <a:cs typeface="Calibri" pitchFamily="34" charset="-120"/>
               </a:rPr>
-              <a:t>Up to three suggestions, only from categories the customer has never bought, each with a one-line reason tied to the occasion.</a:t>
+              <a:t>The categories the occasion needs are already selected — plates, dessert, mixers. The default is IN, not out. Discovery that costs zero decisions.</a:t>
             </a:r>
             <a:endParaRPr lang="en-US" sz="1250" dirty="0"/>
           </a:p>
@@ -11140,7 +11140,7 @@
                 <a:ea typeface="Calibri" pitchFamily="34" charset="-122"/>
                 <a:cs typeface="Calibri" pitchFamily="34" charset="-120"/>
               </a:rPr>
-              <a:t>De-risk the first try</a:t>
+              <a:t>Opt out, then one tap</a:t>
             </a:r>
             <a:endParaRPr lang="en-US" sz="1500" dirty="0"/>
           </a:p>
@@ -11182,7 +11182,7 @@
                 <a:ea typeface="Calibri" pitchFamily="34" charset="-122"/>
                 <a:cs typeface="Calibri" pitchFamily="34" charset="-120"/>
               </a:rPr>
-              <a:t>Starter pack sizing, rating and a why-this screen. Reported honestly: this is the least-endorsed part of the concept.</a:t>
+              <a:t>Swipe away anything you don't want; the total updates; add the rest in a single tap. Each item is a first-ever purchase in that category.</a:t>
             </a:r>
             <a:endParaRPr lang="en-US" sz="1250" dirty="0"/>
           </a:p>
@@ -11248,7 +11248,7 @@
                 <a:ea typeface="Calibri" pitchFamily="34" charset="-122"/>
                 <a:cs typeface="Calibri" pitchFamily="34" charset="-120"/>
               </a:rPr>
-              <a:t>Why AI is not the headline</a:t>
+              <a:t>Why a kit, not a feed</a:t>
             </a:r>
             <a:endParaRPr lang="en-US" sz="1250" dirty="0"/>
           </a:p>
@@ -11277,12 +11277,12 @@
           <a:p>
             <a:pPr indent="0" marL="0">
               <a:lnSpc>
-                <a:spcPct val="120000"/>
+                <a:spcPct val="115000"/>
               </a:lnSpc>
               <a:buNone/>
             </a:pPr>
             <a:r>
-              <a:rPr lang="en-US" sz="1250" dirty="0">
+              <a:rPr lang="en-US" sz="1200" dirty="0">
                 <a:solidFill>
                   <a:srgbClr val="0F2417"/>
                 </a:solidFill>
@@ -11290,9 +11290,9 @@
                 <a:ea typeface="Calibri" pitchFamily="34" charset="-122"/>
                 <a:cs typeface="Calibri" pitchFamily="34" charset="-120"/>
               </a:rPr>
-              <a:t>At 6 occasions and 37 SKUs, a lookup table wins. The LLM earns its place only at real catalog scale, and we say so rather than claim AI-native for its own sake. Production falls back to rules and tells the user when it does.</a:t>
-            </a:r>
-            <a:endParaRPr lang="en-US" sz="1250" dirty="0"/>
+              <a:t>A recommendation feed asks a habit-locked shopper to evaluate each item — the exact friction 92% of them open the app to avoid. The kit flips the default: pre-assembled, opt-out, one commit. Nikhil said it himself — 'one or two useful suggestions, not ten.'</a:t>
+            </a:r>
+            <a:endParaRPr lang="en-US" sz="1200" dirty="0"/>
           </a:p>
         </p:txBody>
       </p:sp>
